--- a/Self-Healing UI Automation (Samsung SDS) - 8 slides.pptx
+++ b/Self-Healing UI Automation (Samsung SDS) - 8 slides.pptx
@@ -9,6 +9,7 @@
   </p:notesMasterIdLst>
   <p:sldIdLst>
     <p:sldId id="256" r:id="rId2"/>
+    <p:sldId id="268" r:id="rId16"/>
     <p:sldId id="257" r:id="rId3"/>
     <p:sldId id="258" r:id="rId4"/>
     <p:sldId id="259" r:id="rId5"/>
@@ -803,6 +804,52 @@
         <p14:creationId xmlns:p14="http://schemas.microsoft.com/office/powerpoint/2010/main" val="1024086991"/>
       </p:ext>
     </p:extLst>
+  </p:cSld>
+  <p:clrMapOvr>
+    <a:masterClrMapping/>
+  </p:clrMapOvr>
+</p:notes>
+</file>
+
+<file path=ppt/notesSlides/notesSlide8.xml><?xml version="1.0" encoding="utf-8"?>
+<p:notes xmlns:a="http://schemas.openxmlformats.org/drawingml/2006/main" xmlns:p="http://schemas.openxmlformats.org/presentationml/2006/main" xmlns:r="http://schemas.openxmlformats.org/officeDocument/2006/relationships">
+  <p:cSld>
+    <p:spTree>
+      <p:nvGrpSpPr>
+        <p:cNvPr id="1" name=""/>
+        <p:cNvGrpSpPr/>
+        <p:nvPr/>
+      </p:nvGrpSpPr>
+      <p:grpSpPr>
+        <a:xfrm>
+          <a:off x="0" y="0"/>
+          <a:ext cx="0" cy="0"/>
+          <a:chOff x="0" y="0"/>
+          <a:chExt cx="0" cy="0"/>
+        </a:xfrm>
+      </p:grpSpPr>
+      <p:sp>
+        <p:nvSpPr>
+          <p:cNvPr id="4" name="Notes Placeholder 2"/>
+          <p:cNvSpPr>
+            <a:spLocks noGrp="1"/>
+          </p:cNvSpPr>
+          <p:nvPr>
+            <p:ph type="body" idx="1"/>
+          </p:nvPr>
+        </p:nvSpPr>
+        <p:spPr/>
+        <p:txBody>
+          <a:bodyPr/>
+          <a:lstStyle/>
+          <a:p>
+            <a:r>
+              <a:t>Six parts: the problem, how it works, the architecture, the demo, then what it is worth. If time is short, go from 'How it works' straight to the demo and finish on the commercial case.</a:t>
+            </a:r>
+          </a:p>
+        </p:txBody>
+      </p:sp>
+    </p:spTree>
   </p:cSld>
   <p:clrMapOvr>
     <a:masterClrMapping/>
@@ -2024,7 +2071,7 @@
                 </a:solidFill>
                 <a:latin typeface="Inter"/>
               </a:rPr>
-              <a:t>PAGE 02 / 07</a:t>
+              <a:t>PAGE 03 / 08</a:t>
             </a:r>
           </a:p>
         </p:txBody>
@@ -4609,7 +4656,7 @@
                 </a:solidFill>
                 <a:latin typeface="Inter"/>
               </a:rPr>
-              <a:t>PAGE 03 / 07</a:t>
+              <a:t>PAGE 04 / 08</a:t>
             </a:r>
           </a:p>
         </p:txBody>
@@ -7263,7 +7310,7 @@
                 </a:solidFill>
                 <a:latin typeface="Inter"/>
               </a:rPr>
-              <a:t>PAGE 04 / 07</a:t>
+              <a:t>PAGE 05 / 08</a:t>
             </a:r>
           </a:p>
         </p:txBody>
@@ -9979,7 +10026,7 @@
                 </a:solidFill>
                 <a:latin typeface="Inter"/>
               </a:rPr>
-              <a:t>llama.cpp · 4-bit GGUF · CUDA</a:t>
+              <a:t>llama.cpp · MXFP4 GGUF · CUDA</a:t>
             </a:r>
           </a:p>
         </p:txBody>
@@ -10363,7 +10410,7 @@
                 </a:solidFill>
                 <a:latin typeface="Inter"/>
               </a:rPr>
-              <a:t>1 GPU server · internal HTTPS</a:t>
+              <a:t>24 GB GPU server · internal HTTPS</a:t>
             </a:r>
           </a:p>
         </p:txBody>
@@ -10751,7 +10798,7 @@
                 </a:solidFill>
                 <a:latin typeface="Inter"/>
               </a:rPr>
-              <a:t>PAGE 05 / 07</a:t>
+              <a:t>PAGE 06 / 08</a:t>
             </a:r>
           </a:p>
         </p:txBody>
@@ -11411,7 +11458,7 @@
                 </a:solidFill>
                 <a:latin typeface="Inter"/>
               </a:rPr>
-              <a:t>PAGE 06 / 07</a:t>
+              <a:t>PAGE 07 / 08</a:t>
             </a:r>
           </a:p>
         </p:txBody>
@@ -12995,7 +13042,7 @@
                 </a:solidFill>
                 <a:latin typeface="Inter"/>
               </a:rPr>
-              <a:t>07</a:t>
+              <a:t>08</a:t>
             </a:r>
             <a:r>
               <a:rPr sz="534" b="0" spc="78" dirty="0">
@@ -13013,7 +13060,7 @@
                 </a:solidFill>
                 <a:latin typeface="Inter"/>
               </a:rPr>
-              <a:t>07</a:t>
+              <a:t>08</a:t>
             </a:r>
             <a:endParaRPr sz="534" b="0" spc="78" dirty="0">
               <a:solidFill>
@@ -13959,6 +14006,1786 @@
       </p:transition>
     </mc:Fallback>
   </mc:AlternateContent>
+</p:sld>
+</file>
+
+<file path=ppt/slides/slide8.xml><?xml version="1.0" encoding="utf-8"?>
+<p:sld xmlns:a="http://schemas.openxmlformats.org/drawingml/2006/main" xmlns:p="http://schemas.openxmlformats.org/presentationml/2006/main" xmlns:r="http://schemas.openxmlformats.org/officeDocument/2006/relationships">
+  <p:cSld>
+    <p:spTree>
+      <p:nvGrpSpPr>
+        <p:cNvPr id="1" name=""/>
+        <p:cNvGrpSpPr/>
+        <p:nvPr/>
+      </p:nvGrpSpPr>
+      <p:grpSpPr/>
+      <p:sp>
+        <p:nvSpPr>
+          <p:cNvPr id="3" name="Header bar"/>
+          <p:cNvSpPr/>
+          <p:nvPr/>
+        </p:nvSpPr>
+        <p:spPr>
+          <a:xfrm>
+            <a:off x="0" y="0"/>
+            <a:ext cx="9144000" cy="266730"/>
+          </a:xfrm>
+          <a:prstGeom prst="rect">
+            <a:avLst/>
+          </a:prstGeom>
+          <a:solidFill>
+            <a:srgbClr val="1A2340"/>
+          </a:solidFill>
+          <a:ln>
+            <a:noFill/>
+          </a:ln>
+          <a:effectLst/>
+        </p:spPr>
+        <p:style>
+          <a:lnRef idx="1">
+            <a:schemeClr val="accent1"/>
+          </a:lnRef>
+          <a:fillRef idx="3">
+            <a:schemeClr val="accent1"/>
+          </a:fillRef>
+          <a:effectRef idx="2">
+            <a:schemeClr val="accent1"/>
+          </a:effectRef>
+          <a:fontRef idx="minor">
+            <a:schemeClr val="lt1"/>
+          </a:fontRef>
+        </p:style>
+        <p:txBody>
+          <a:bodyPr rtlCol="0" anchor="ctr"/>
+          <a:lstStyle/>
+          <a:p>
+            <a:pPr algn="ctr"/>
+            <a:endParaRPr/>
+          </a:p>
+        </p:txBody>
+      </p:sp>
+      <p:sp>
+        <p:nvSpPr>
+          <p:cNvPr id="4" name="Header text"/>
+          <p:cNvSpPr txBox="1"/>
+          <p:nvPr/>
+        </p:nvSpPr>
+        <p:spPr>
+          <a:xfrm>
+            <a:off x="666598" y="80924"/>
+            <a:ext cx="7616952" cy="182880"/>
+          </a:xfrm>
+          <a:prstGeom prst="rect">
+            <a:avLst/>
+          </a:prstGeom>
+          <a:noFill/>
+        </p:spPr>
+        <p:txBody>
+          <a:bodyPr wrap="square" lIns="0" tIns="0" rIns="0" bIns="0" anchor="t">
+            <a:noAutofit/>
+          </a:bodyPr>
+          <a:lstStyle/>
+          <a:p>
+            <a:pPr algn="l"/>
+            <a:r>
+              <a:rPr sz="855" b="1" i="0" spc="21">
+                <a:solidFill>
+                  <a:srgbClr val="FFFFFF"/>
+                </a:solidFill>
+                <a:latin typeface="Inter"/>
+              </a:rPr>
+              <a:t>SAMSUNG SDS</a:t>
+            </a:r>
+            <a:r>
+              <a:rPr sz="855" b="0" i="0" spc="21">
+                <a:solidFill>
+                  <a:srgbClr val="B9C6DA"/>
+                </a:solidFill>
+                <a:latin typeface="Inter"/>
+              </a:rPr>
+              <a:t>   |   </a:t>
+            </a:r>
+            <a:r>
+              <a:rPr sz="855" b="1" i="0" spc="21">
+                <a:solidFill>
+                  <a:srgbClr val="B9C6DA"/>
+                </a:solidFill>
+                <a:latin typeface="Inter"/>
+              </a:rPr>
+              <a:t>AGENDA</a:t>
+            </a:r>
+          </a:p>
+        </p:txBody>
+      </p:sp>
+      <p:sp>
+        <p:nvSpPr>
+          <p:cNvPr id="5" name="Template dash 1"/>
+          <p:cNvSpPr/>
+          <p:nvPr/>
+        </p:nvSpPr>
+        <p:spPr>
+          <a:xfrm>
+            <a:off x="666598" y="404805"/>
+            <a:ext cx="300015" cy="38130"/>
+          </a:xfrm>
+          <a:prstGeom prst="rect">
+            <a:avLst/>
+          </a:prstGeom>
+          <a:solidFill>
+            <a:srgbClr val="16161A"/>
+          </a:solidFill>
+          <a:ln>
+            <a:noFill/>
+          </a:ln>
+          <a:effectLst/>
+        </p:spPr>
+        <p:style>
+          <a:lnRef idx="1">
+            <a:schemeClr val="accent1"/>
+          </a:lnRef>
+          <a:fillRef idx="3">
+            <a:schemeClr val="accent1"/>
+          </a:fillRef>
+          <a:effectRef idx="2">
+            <a:schemeClr val="accent1"/>
+          </a:effectRef>
+          <a:fontRef idx="minor">
+            <a:schemeClr val="lt1"/>
+          </a:fontRef>
+        </p:style>
+        <p:txBody>
+          <a:bodyPr rtlCol="0" anchor="ctr"/>
+          <a:lstStyle/>
+          <a:p>
+            <a:pPr algn="ctr"/>
+            <a:endParaRPr/>
+          </a:p>
+        </p:txBody>
+      </p:sp>
+      <p:sp>
+        <p:nvSpPr>
+          <p:cNvPr id="6" name="Template dash 2"/>
+          <p:cNvSpPr/>
+          <p:nvPr/>
+        </p:nvSpPr>
+        <p:spPr>
+          <a:xfrm>
+            <a:off x="999988" y="404805"/>
+            <a:ext cx="300015" cy="38130"/>
+          </a:xfrm>
+          <a:prstGeom prst="rect">
+            <a:avLst/>
+          </a:prstGeom>
+          <a:solidFill>
+            <a:srgbClr val="2A5C9E"/>
+          </a:solidFill>
+          <a:ln>
+            <a:noFill/>
+          </a:ln>
+          <a:effectLst/>
+        </p:spPr>
+        <p:style>
+          <a:lnRef idx="1">
+            <a:schemeClr val="accent1"/>
+          </a:lnRef>
+          <a:fillRef idx="3">
+            <a:schemeClr val="accent1"/>
+          </a:fillRef>
+          <a:effectRef idx="2">
+            <a:schemeClr val="accent1"/>
+          </a:effectRef>
+          <a:fontRef idx="minor">
+            <a:schemeClr val="lt1"/>
+          </a:fontRef>
+        </p:style>
+        <p:txBody>
+          <a:bodyPr rtlCol="0" anchor="ctr"/>
+          <a:lstStyle/>
+          <a:p>
+            <a:pPr algn="ctr"/>
+            <a:endParaRPr/>
+          </a:p>
+        </p:txBody>
+      </p:sp>
+      <p:sp>
+        <p:nvSpPr>
+          <p:cNvPr id="7" name="Template dash 3"/>
+          <p:cNvSpPr/>
+          <p:nvPr/>
+        </p:nvSpPr>
+        <p:spPr>
+          <a:xfrm>
+            <a:off x="1333378" y="404805"/>
+            <a:ext cx="300015" cy="38130"/>
+          </a:xfrm>
+          <a:prstGeom prst="rect">
+            <a:avLst/>
+          </a:prstGeom>
+          <a:solidFill>
+            <a:srgbClr val="5F8B2F"/>
+          </a:solidFill>
+          <a:ln>
+            <a:noFill/>
+          </a:ln>
+          <a:effectLst/>
+        </p:spPr>
+        <p:style>
+          <a:lnRef idx="1">
+            <a:schemeClr val="accent1"/>
+          </a:lnRef>
+          <a:fillRef idx="3">
+            <a:schemeClr val="accent1"/>
+          </a:fillRef>
+          <a:effectRef idx="2">
+            <a:schemeClr val="accent1"/>
+          </a:effectRef>
+          <a:fontRef idx="minor">
+            <a:schemeClr val="lt1"/>
+          </a:fontRef>
+        </p:style>
+        <p:txBody>
+          <a:bodyPr rtlCol="0" anchor="ctr"/>
+          <a:lstStyle/>
+          <a:p>
+            <a:pPr algn="ctr"/>
+            <a:endParaRPr/>
+          </a:p>
+        </p:txBody>
+      </p:sp>
+      <p:sp>
+        <p:nvSpPr>
+          <p:cNvPr id="8" name="Template dash 4"/>
+          <p:cNvSpPr/>
+          <p:nvPr/>
+        </p:nvSpPr>
+        <p:spPr>
+          <a:xfrm>
+            <a:off x="1666768" y="404805"/>
+            <a:ext cx="300015" cy="38130"/>
+          </a:xfrm>
+          <a:prstGeom prst="rect">
+            <a:avLst/>
+          </a:prstGeom>
+          <a:solidFill>
+            <a:srgbClr val="C1702D"/>
+          </a:solidFill>
+          <a:ln>
+            <a:noFill/>
+          </a:ln>
+          <a:effectLst/>
+        </p:spPr>
+        <p:style>
+          <a:lnRef idx="1">
+            <a:schemeClr val="accent1"/>
+          </a:lnRef>
+          <a:fillRef idx="3">
+            <a:schemeClr val="accent1"/>
+          </a:fillRef>
+          <a:effectRef idx="2">
+            <a:schemeClr val="accent1"/>
+          </a:effectRef>
+          <a:fontRef idx="minor">
+            <a:schemeClr val="lt1"/>
+          </a:fontRef>
+        </p:style>
+        <p:txBody>
+          <a:bodyPr rtlCol="0" anchor="ctr"/>
+          <a:lstStyle/>
+          <a:p>
+            <a:pPr algn="ctr"/>
+            <a:endParaRPr/>
+          </a:p>
+        </p:txBody>
+      </p:sp>
+      <p:sp>
+        <p:nvSpPr>
+          <p:cNvPr id="9" name="Confidential"/>
+          <p:cNvSpPr txBox="1"/>
+          <p:nvPr/>
+        </p:nvSpPr>
+        <p:spPr>
+          <a:xfrm>
+            <a:off x="3143250" y="4934102"/>
+            <a:ext cx="2857500" cy="137160"/>
+          </a:xfrm>
+          <a:prstGeom prst="rect">
+            <a:avLst/>
+          </a:prstGeom>
+          <a:noFill/>
+        </p:spPr>
+        <p:txBody>
+          <a:bodyPr wrap="square" lIns="0" tIns="0" rIns="0" bIns="0" anchor="t">
+            <a:noAutofit/>
+          </a:bodyPr>
+          <a:lstStyle/>
+          <a:p>
+            <a:pPr algn="ctr"/>
+            <a:r>
+              <a:rPr sz="606" b="0" i="0" spc="57">
+                <a:solidFill>
+                  <a:srgbClr val="7A7F8A"/>
+                </a:solidFill>
+                <a:latin typeface="Inter"/>
+              </a:rPr>
+              <a:t>Confidential</a:t>
+            </a:r>
+          </a:p>
+        </p:txBody>
+      </p:sp>
+      <p:sp>
+        <p:nvSpPr>
+          <p:cNvPr id="10" name="Page number"/>
+          <p:cNvSpPr txBox="1"/>
+          <p:nvPr/>
+        </p:nvSpPr>
+        <p:spPr>
+          <a:xfrm>
+            <a:off x="7315200" y="4753051"/>
+            <a:ext cx="1161288" cy="109728"/>
+          </a:xfrm>
+          <a:prstGeom prst="rect">
+            <a:avLst/>
+          </a:prstGeom>
+          <a:noFill/>
+        </p:spPr>
+        <p:txBody>
+          <a:bodyPr wrap="square" lIns="0" tIns="0" rIns="0" bIns="0" anchor="t">
+            <a:noAutofit/>
+          </a:bodyPr>
+          <a:lstStyle/>
+          <a:p>
+            <a:pPr algn="r"/>
+            <a:r>
+              <a:rPr sz="534" b="0" i="0" spc="78">
+                <a:solidFill>
+                  <a:srgbClr val="7A7F8A"/>
+                </a:solidFill>
+                <a:latin typeface="Inter"/>
+              </a:rPr>
+              <a:t>PAGE 02 / 08</a:t>
+            </a:r>
+          </a:p>
+        </p:txBody>
+      </p:sp>
+      <p:sp>
+        <p:nvSpPr>
+          <p:cNvPr id="11" name="Footer brand"/>
+          <p:cNvSpPr txBox="1"/>
+          <p:nvPr/>
+        </p:nvSpPr>
+        <p:spPr>
+          <a:xfrm>
+            <a:off x="5619902" y="4895698"/>
+            <a:ext cx="2857500" cy="192024"/>
+          </a:xfrm>
+          <a:prstGeom prst="rect">
+            <a:avLst/>
+          </a:prstGeom>
+          <a:noFill/>
+        </p:spPr>
+        <p:txBody>
+          <a:bodyPr wrap="square" lIns="0" tIns="0" rIns="0" bIns="0" anchor="t">
+            <a:noAutofit/>
+          </a:bodyPr>
+          <a:lstStyle/>
+          <a:p>
+            <a:pPr algn="r"/>
+            <a:r>
+              <a:rPr sz="855" b="1" i="0" spc="14">
+                <a:solidFill>
+                  <a:srgbClr val="1428A0"/>
+                </a:solidFill>
+                <a:latin typeface="Inter"/>
+              </a:rPr>
+              <a:t>SAMSUNG SDS</a:t>
+            </a:r>
+          </a:p>
+        </p:txBody>
+      </p:sp>
+      <p:sp>
+        <p:nvSpPr>
+          <p:cNvPr id="12" name="Title"/>
+          <p:cNvSpPr txBox="1"/>
+          <p:nvPr/>
+        </p:nvSpPr>
+        <p:spPr>
+          <a:xfrm>
+            <a:off x="667512" y="548640"/>
+            <a:ext cx="7808976" cy="384048"/>
+          </a:xfrm>
+          <a:prstGeom prst="rect">
+            <a:avLst/>
+          </a:prstGeom>
+          <a:noFill/>
+        </p:spPr>
+        <p:txBody>
+          <a:bodyPr wrap="square" lIns="0" tIns="0" rIns="0" bIns="0" anchor="t">
+            <a:noAutofit/>
+          </a:bodyPr>
+          <a:lstStyle/>
+          <a:p>
+            <a:pPr algn="l"/>
+            <a:r>
+              <a:rPr lang="en-US" sz="2000" b="1" i="0" spc="-60" dirty="0">
+                <a:solidFill>
+                  <a:srgbClr val="1A1A1E"/>
+                </a:solidFill>
+                <a:latin typeface="Inter"/>
+              </a:rPr>
+              <a:t>From the problem to the business case, in six steps.</a:t>
+            </a:r>
+            <a:endParaRPr sz="2000" b="1" i="0" spc="-60" dirty="0">
+              <a:solidFill>
+                <a:srgbClr val="1A1A1E"/>
+              </a:solidFill>
+              <a:latin typeface="Inter"/>
+            </a:endParaRPr>
+          </a:p>
+        </p:txBody>
+      </p:sp>
+      <p:sp>
+        <p:nvSpPr>
+          <p:cNvPr id="15" name="Agenda card 1"/>
+          <p:cNvSpPr/>
+          <p:nvPr/>
+        </p:nvSpPr>
+        <p:spPr>
+          <a:xfrm>
+            <a:off x="667512" y="1207008"/>
+            <a:ext cx="2481071" cy="1527048"/>
+          </a:xfrm>
+          <a:prstGeom prst="roundRect">
+            <a:avLst>
+              <a:gd name="adj" fmla="val 3664"/>
+            </a:avLst>
+          </a:prstGeom>
+          <a:solidFill>
+            <a:srgbClr val="F4F6FA"/>
+          </a:solidFill>
+          <a:ln w="7620">
+            <a:solidFill>
+              <a:srgbClr val="D7DEEA"/>
+            </a:solidFill>
+          </a:ln>
+          <a:effectLst/>
+        </p:spPr>
+        <p:style>
+          <a:lnRef idx="1">
+            <a:schemeClr val="accent1"/>
+          </a:lnRef>
+          <a:fillRef idx="3">
+            <a:schemeClr val="accent1"/>
+          </a:fillRef>
+          <a:effectRef idx="2">
+            <a:schemeClr val="accent1"/>
+          </a:effectRef>
+          <a:fontRef idx="minor">
+            <a:schemeClr val="lt1"/>
+          </a:fontRef>
+        </p:style>
+        <p:txBody>
+          <a:bodyPr rtlCol="0" anchor="ctr"/>
+          <a:lstStyle/>
+          <a:p>
+            <a:pPr algn="ctr"/>
+            <a:endParaRPr/>
+          </a:p>
+        </p:txBody>
+      </p:sp>
+      <p:sp>
+        <p:nvSpPr>
+          <p:cNvPr id="16" name="Agenda icon circle 1"/>
+          <p:cNvSpPr/>
+          <p:nvPr/>
+        </p:nvSpPr>
+        <p:spPr>
+          <a:xfrm>
+            <a:off x="850392" y="1426464"/>
+            <a:ext cx="402336" cy="402336"/>
+          </a:xfrm>
+          <a:prstGeom prst="ellipse">
+            <a:avLst/>
+          </a:prstGeom>
+          <a:solidFill>
+            <a:srgbClr val="C1702D"/>
+          </a:solidFill>
+          <a:ln>
+            <a:noFill/>
+          </a:ln>
+          <a:effectLst/>
+        </p:spPr>
+        <p:style>
+          <a:lnRef idx="1">
+            <a:schemeClr val="accent1"/>
+          </a:lnRef>
+          <a:fillRef idx="3">
+            <a:schemeClr val="accent1"/>
+          </a:fillRef>
+          <a:effectRef idx="2">
+            <a:schemeClr val="accent1"/>
+          </a:effectRef>
+          <a:fontRef idx="minor">
+            <a:schemeClr val="lt1"/>
+          </a:fontRef>
+        </p:style>
+        <p:txBody>
+          <a:bodyPr rtlCol="0" anchor="ctr"/>
+          <a:lstStyle/>
+          <a:p>
+            <a:pPr algn="ctr"/>
+            <a:endParaRPr/>
+          </a:p>
+        </p:txBody>
+      </p:sp>
+      <p:pic>
+        <p:nvPicPr>
+          <p:cNvPr id="17" name="Agenda icon 1" descr="image.png"/>
+          <p:cNvPicPr>
+            <a:picLocks noChangeAspect="1"/>
+          </p:cNvPicPr>
+          <p:nvPr/>
+        </p:nvPicPr>
+        <p:blipFill>
+          <a:blip r:embed="rId2"/>
+          <a:stretch>
+            <a:fillRect/>
+          </a:stretch>
+        </p:blipFill>
+        <p:spPr>
+          <a:xfrm>
+            <a:off x="946403" y="1522476"/>
+            <a:ext cx="210312" cy="210312"/>
+          </a:xfrm>
+          <a:prstGeom prst="rect">
+            <a:avLst/>
+          </a:prstGeom>
+        </p:spPr>
+      </p:pic>
+      <p:sp>
+        <p:nvSpPr>
+          <p:cNvPr id="19" name="Agenda number 1"/>
+          <p:cNvSpPr txBox="1"/>
+          <p:nvPr/>
+        </p:nvSpPr>
+        <p:spPr>
+          <a:xfrm>
+            <a:off x="2599943" y="1463040"/>
+            <a:ext cx="365760" cy="146304"/>
+          </a:xfrm>
+          <a:prstGeom prst="rect">
+            <a:avLst/>
+          </a:prstGeom>
+          <a:noFill/>
+        </p:spPr>
+        <p:txBody>
+          <a:bodyPr wrap="square" lIns="0" tIns="0" rIns="0" bIns="0" anchor="t">
+            <a:noAutofit/>
+          </a:bodyPr>
+          <a:lstStyle/>
+          <a:p>
+            <a:pPr algn="r"/>
+            <a:r>
+              <a:rPr sz="650" b="1" i="0">
+                <a:solidFill>
+                  <a:srgbClr val="9A5620"/>
+                </a:solidFill>
+                <a:latin typeface="JetBrains Mono"/>
+              </a:rPr>
+              <a:t>01</a:t>
+            </a:r>
+          </a:p>
+        </p:txBody>
+      </p:sp>
+      <p:sp>
+        <p:nvSpPr>
+          <p:cNvPr id="20" name="Agenda title 1"/>
+          <p:cNvSpPr txBox="1"/>
+          <p:nvPr/>
+        </p:nvSpPr>
+        <p:spPr>
+          <a:xfrm>
+            <a:off x="850392" y="2029968"/>
+            <a:ext cx="2115311" cy="219456"/>
+          </a:xfrm>
+          <a:prstGeom prst="rect">
+            <a:avLst/>
+          </a:prstGeom>
+          <a:noFill/>
+        </p:spPr>
+        <p:txBody>
+          <a:bodyPr wrap="square" lIns="0" tIns="0" rIns="0" bIns="0" anchor="t">
+            <a:noAutofit/>
+          </a:bodyPr>
+          <a:lstStyle/>
+          <a:p>
+            <a:pPr algn="l"/>
+            <a:r>
+              <a:rPr sz="1200" b="1" i="0">
+                <a:solidFill>
+                  <a:srgbClr val="1A1A1E"/>
+                </a:solidFill>
+                <a:latin typeface="Inter"/>
+              </a:rPr>
+              <a:t>The problem</a:t>
+            </a:r>
+          </a:p>
+        </p:txBody>
+      </p:sp>
+      <p:sp>
+        <p:nvSpPr>
+          <p:cNvPr id="21" name="Agenda line 1"/>
+          <p:cNvSpPr txBox="1"/>
+          <p:nvPr/>
+        </p:nvSpPr>
+        <p:spPr>
+          <a:xfrm>
+            <a:off x="850392" y="2304288"/>
+            <a:ext cx="2115311" cy="329184"/>
+          </a:xfrm>
+          <a:prstGeom prst="rect">
+            <a:avLst/>
+          </a:prstGeom>
+          <a:noFill/>
+        </p:spPr>
+        <p:txBody>
+          <a:bodyPr wrap="square" lIns="0" tIns="0" rIns="0" bIns="0" anchor="t">
+            <a:noAutofit/>
+          </a:bodyPr>
+          <a:lstStyle/>
+          <a:p>
+            <a:pPr algn="l"/>
+            <a:r>
+              <a:rPr sz="950" b="0" i="0" dirty="0">
+                <a:solidFill>
+                  <a:srgbClr val="4A5668"/>
+                </a:solidFill>
+                <a:latin typeface="Inter"/>
+              </a:rPr>
+              <a:t>One renamed field stops a robot.</a:t>
+            </a:r>
+          </a:p>
+        </p:txBody>
+      </p:sp>
+      <p:sp>
+        <p:nvSpPr>
+          <p:cNvPr id="22" name="Agenda card 2"/>
+          <p:cNvSpPr/>
+          <p:nvPr/>
+        </p:nvSpPr>
+        <p:spPr>
+          <a:xfrm>
+            <a:off x="3331464" y="1207008"/>
+            <a:ext cx="2481071" cy="1527048"/>
+          </a:xfrm>
+          <a:prstGeom prst="roundRect">
+            <a:avLst>
+              <a:gd name="adj" fmla="val 3664"/>
+            </a:avLst>
+          </a:prstGeom>
+          <a:solidFill>
+            <a:srgbClr val="F4F6FA"/>
+          </a:solidFill>
+          <a:ln w="7620">
+            <a:solidFill>
+              <a:srgbClr val="D7DEEA"/>
+            </a:solidFill>
+          </a:ln>
+          <a:effectLst/>
+        </p:spPr>
+        <p:style>
+          <a:lnRef idx="1">
+            <a:schemeClr val="accent1"/>
+          </a:lnRef>
+          <a:fillRef idx="3">
+            <a:schemeClr val="accent1"/>
+          </a:fillRef>
+          <a:effectRef idx="2">
+            <a:schemeClr val="accent1"/>
+          </a:effectRef>
+          <a:fontRef idx="minor">
+            <a:schemeClr val="lt1"/>
+          </a:fontRef>
+        </p:style>
+        <p:txBody>
+          <a:bodyPr rtlCol="0" anchor="ctr"/>
+          <a:lstStyle/>
+          <a:p>
+            <a:pPr algn="ctr"/>
+            <a:endParaRPr/>
+          </a:p>
+        </p:txBody>
+      </p:sp>
+      <p:sp>
+        <p:nvSpPr>
+          <p:cNvPr id="23" name="Agenda icon circle 2"/>
+          <p:cNvSpPr/>
+          <p:nvPr/>
+        </p:nvSpPr>
+        <p:spPr>
+          <a:xfrm>
+            <a:off x="3514344" y="1426464"/>
+            <a:ext cx="402336" cy="402336"/>
+          </a:xfrm>
+          <a:prstGeom prst="ellipse">
+            <a:avLst/>
+          </a:prstGeom>
+          <a:solidFill>
+            <a:srgbClr val="1428A0"/>
+          </a:solidFill>
+          <a:ln>
+            <a:noFill/>
+          </a:ln>
+          <a:effectLst/>
+        </p:spPr>
+        <p:style>
+          <a:lnRef idx="1">
+            <a:schemeClr val="accent1"/>
+          </a:lnRef>
+          <a:fillRef idx="3">
+            <a:schemeClr val="accent1"/>
+          </a:fillRef>
+          <a:effectRef idx="2">
+            <a:schemeClr val="accent1"/>
+          </a:effectRef>
+          <a:fontRef idx="minor">
+            <a:schemeClr val="lt1"/>
+          </a:fontRef>
+        </p:style>
+        <p:txBody>
+          <a:bodyPr rtlCol="0" anchor="ctr"/>
+          <a:lstStyle/>
+          <a:p>
+            <a:pPr algn="ctr"/>
+            <a:endParaRPr/>
+          </a:p>
+        </p:txBody>
+      </p:sp>
+      <p:pic>
+        <p:nvPicPr>
+          <p:cNvPr id="24" name="Agenda icon 2" descr="image.png"/>
+          <p:cNvPicPr>
+            <a:picLocks noChangeAspect="1"/>
+          </p:cNvPicPr>
+          <p:nvPr/>
+        </p:nvPicPr>
+        <p:blipFill>
+          <a:blip r:embed="rId3"/>
+          <a:stretch>
+            <a:fillRect/>
+          </a:stretch>
+        </p:blipFill>
+        <p:spPr>
+          <a:xfrm>
+            <a:off x="3610356" y="1522476"/>
+            <a:ext cx="210312" cy="210312"/>
+          </a:xfrm>
+          <a:prstGeom prst="rect">
+            <a:avLst/>
+          </a:prstGeom>
+        </p:spPr>
+      </p:pic>
+      <p:sp>
+        <p:nvSpPr>
+          <p:cNvPr id="25" name="Agenda number 2"/>
+          <p:cNvSpPr txBox="1"/>
+          <p:nvPr/>
+        </p:nvSpPr>
+        <p:spPr>
+          <a:xfrm>
+            <a:off x="5263895" y="1463040"/>
+            <a:ext cx="365760" cy="146304"/>
+          </a:xfrm>
+          <a:prstGeom prst="rect">
+            <a:avLst/>
+          </a:prstGeom>
+          <a:noFill/>
+        </p:spPr>
+        <p:txBody>
+          <a:bodyPr wrap="square" lIns="0" tIns="0" rIns="0" bIns="0" anchor="t">
+            <a:noAutofit/>
+          </a:bodyPr>
+          <a:lstStyle/>
+          <a:p>
+            <a:pPr algn="r"/>
+            <a:r>
+              <a:rPr sz="650" b="1" i="0">
+                <a:solidFill>
+                  <a:srgbClr val="1428A0"/>
+                </a:solidFill>
+                <a:latin typeface="JetBrains Mono"/>
+              </a:rPr>
+              <a:t>02</a:t>
+            </a:r>
+          </a:p>
+        </p:txBody>
+      </p:sp>
+      <p:sp>
+        <p:nvSpPr>
+          <p:cNvPr id="26" name="Agenda title 2"/>
+          <p:cNvSpPr txBox="1"/>
+          <p:nvPr/>
+        </p:nvSpPr>
+        <p:spPr>
+          <a:xfrm>
+            <a:off x="3514344" y="2029968"/>
+            <a:ext cx="2115311" cy="219456"/>
+          </a:xfrm>
+          <a:prstGeom prst="rect">
+            <a:avLst/>
+          </a:prstGeom>
+          <a:noFill/>
+        </p:spPr>
+        <p:txBody>
+          <a:bodyPr wrap="square" lIns="0" tIns="0" rIns="0" bIns="0" anchor="t">
+            <a:noAutofit/>
+          </a:bodyPr>
+          <a:lstStyle/>
+          <a:p>
+            <a:pPr algn="l"/>
+            <a:r>
+              <a:rPr sz="1200" b="1" i="0">
+                <a:solidFill>
+                  <a:srgbClr val="1A1A1E"/>
+                </a:solidFill>
+                <a:latin typeface="Inter"/>
+              </a:rPr>
+              <a:t>How it works</a:t>
+            </a:r>
+          </a:p>
+        </p:txBody>
+      </p:sp>
+      <p:sp>
+        <p:nvSpPr>
+          <p:cNvPr id="27" name="Agenda line 2"/>
+          <p:cNvSpPr txBox="1"/>
+          <p:nvPr/>
+        </p:nvSpPr>
+        <p:spPr>
+          <a:xfrm>
+            <a:off x="3514344" y="2304288"/>
+            <a:ext cx="2115311" cy="329184"/>
+          </a:xfrm>
+          <a:prstGeom prst="rect">
+            <a:avLst/>
+          </a:prstGeom>
+          <a:noFill/>
+        </p:spPr>
+        <p:txBody>
+          <a:bodyPr wrap="square" lIns="0" tIns="0" rIns="0" bIns="0" anchor="t">
+            <a:noAutofit/>
+          </a:bodyPr>
+          <a:lstStyle/>
+          <a:p>
+            <a:pPr algn="l"/>
+            <a:r>
+              <a:rPr sz="950" b="0" i="0" dirty="0">
+                <a:solidFill>
+                  <a:srgbClr val="4A5668"/>
+                </a:solidFill>
+                <a:latin typeface="Inter"/>
+              </a:rPr>
+              <a:t>Repaired in about six seconds.</a:t>
+            </a:r>
+          </a:p>
+        </p:txBody>
+      </p:sp>
+      <p:sp>
+        <p:nvSpPr>
+          <p:cNvPr id="28" name="Agenda card 3"/>
+          <p:cNvSpPr/>
+          <p:nvPr/>
+        </p:nvSpPr>
+        <p:spPr>
+          <a:xfrm>
+            <a:off x="5995416" y="1207008"/>
+            <a:ext cx="2481071" cy="1527048"/>
+          </a:xfrm>
+          <a:prstGeom prst="roundRect">
+            <a:avLst>
+              <a:gd name="adj" fmla="val 3664"/>
+            </a:avLst>
+          </a:prstGeom>
+          <a:solidFill>
+            <a:srgbClr val="F4F6FA"/>
+          </a:solidFill>
+          <a:ln w="7620">
+            <a:solidFill>
+              <a:srgbClr val="D7DEEA"/>
+            </a:solidFill>
+          </a:ln>
+          <a:effectLst/>
+        </p:spPr>
+        <p:style>
+          <a:lnRef idx="1">
+            <a:schemeClr val="accent1"/>
+          </a:lnRef>
+          <a:fillRef idx="3">
+            <a:schemeClr val="accent1"/>
+          </a:fillRef>
+          <a:effectRef idx="2">
+            <a:schemeClr val="accent1"/>
+          </a:effectRef>
+          <a:fontRef idx="minor">
+            <a:schemeClr val="lt1"/>
+          </a:fontRef>
+        </p:style>
+        <p:txBody>
+          <a:bodyPr rtlCol="0" anchor="ctr"/>
+          <a:lstStyle/>
+          <a:p>
+            <a:pPr algn="ctr"/>
+            <a:endParaRPr/>
+          </a:p>
+        </p:txBody>
+      </p:sp>
+      <p:sp>
+        <p:nvSpPr>
+          <p:cNvPr id="29" name="Agenda icon circle 3"/>
+          <p:cNvSpPr/>
+          <p:nvPr/>
+        </p:nvSpPr>
+        <p:spPr>
+          <a:xfrm>
+            <a:off x="6178296" y="1426464"/>
+            <a:ext cx="402336" cy="402336"/>
+          </a:xfrm>
+          <a:prstGeom prst="ellipse">
+            <a:avLst/>
+          </a:prstGeom>
+          <a:solidFill>
+            <a:srgbClr val="2A5C9E"/>
+          </a:solidFill>
+          <a:ln>
+            <a:noFill/>
+          </a:ln>
+          <a:effectLst/>
+        </p:spPr>
+        <p:style>
+          <a:lnRef idx="1">
+            <a:schemeClr val="accent1"/>
+          </a:lnRef>
+          <a:fillRef idx="3">
+            <a:schemeClr val="accent1"/>
+          </a:fillRef>
+          <a:effectRef idx="2">
+            <a:schemeClr val="accent1"/>
+          </a:effectRef>
+          <a:fontRef idx="minor">
+            <a:schemeClr val="lt1"/>
+          </a:fontRef>
+        </p:style>
+        <p:txBody>
+          <a:bodyPr rtlCol="0" anchor="ctr"/>
+          <a:lstStyle/>
+          <a:p>
+            <a:pPr algn="ctr"/>
+            <a:endParaRPr/>
+          </a:p>
+        </p:txBody>
+      </p:sp>
+      <p:pic>
+        <p:nvPicPr>
+          <p:cNvPr id="30" name="Agenda icon 3" descr="image.png"/>
+          <p:cNvPicPr>
+            <a:picLocks noChangeAspect="1"/>
+          </p:cNvPicPr>
+          <p:nvPr/>
+        </p:nvPicPr>
+        <p:blipFill>
+          <a:blip r:embed="rId4"/>
+          <a:stretch>
+            <a:fillRect/>
+          </a:stretch>
+        </p:blipFill>
+        <p:spPr>
+          <a:xfrm>
+            <a:off x="6274308" y="1522476"/>
+            <a:ext cx="210312" cy="210312"/>
+          </a:xfrm>
+          <a:prstGeom prst="rect">
+            <a:avLst/>
+          </a:prstGeom>
+        </p:spPr>
+      </p:pic>
+      <p:sp>
+        <p:nvSpPr>
+          <p:cNvPr id="31" name="Agenda number 3"/>
+          <p:cNvSpPr txBox="1"/>
+          <p:nvPr/>
+        </p:nvSpPr>
+        <p:spPr>
+          <a:xfrm>
+            <a:off x="7927848" y="1463040"/>
+            <a:ext cx="365760" cy="146304"/>
+          </a:xfrm>
+          <a:prstGeom prst="rect">
+            <a:avLst/>
+          </a:prstGeom>
+          <a:noFill/>
+        </p:spPr>
+        <p:txBody>
+          <a:bodyPr wrap="square" lIns="0" tIns="0" rIns="0" bIns="0" anchor="t">
+            <a:noAutofit/>
+          </a:bodyPr>
+          <a:lstStyle/>
+          <a:p>
+            <a:pPr algn="r"/>
+            <a:r>
+              <a:rPr sz="650" b="1" i="0">
+                <a:solidFill>
+                  <a:srgbClr val="2A5C9E"/>
+                </a:solidFill>
+                <a:latin typeface="JetBrains Mono"/>
+              </a:rPr>
+              <a:t>03</a:t>
+            </a:r>
+          </a:p>
+        </p:txBody>
+      </p:sp>
+      <p:sp>
+        <p:nvSpPr>
+          <p:cNvPr id="32" name="Agenda title 3"/>
+          <p:cNvSpPr txBox="1"/>
+          <p:nvPr/>
+        </p:nvSpPr>
+        <p:spPr>
+          <a:xfrm>
+            <a:off x="6178296" y="2029968"/>
+            <a:ext cx="2115311" cy="219456"/>
+          </a:xfrm>
+          <a:prstGeom prst="rect">
+            <a:avLst/>
+          </a:prstGeom>
+          <a:noFill/>
+        </p:spPr>
+        <p:txBody>
+          <a:bodyPr wrap="square" lIns="0" tIns="0" rIns="0" bIns="0" anchor="t">
+            <a:noAutofit/>
+          </a:bodyPr>
+          <a:lstStyle/>
+          <a:p>
+            <a:pPr algn="l"/>
+            <a:r>
+              <a:rPr sz="1200" b="1" i="0">
+                <a:solidFill>
+                  <a:srgbClr val="1A1A1E"/>
+                </a:solidFill>
+                <a:latin typeface="Inter"/>
+              </a:rPr>
+              <a:t>Architecture</a:t>
+            </a:r>
+          </a:p>
+        </p:txBody>
+      </p:sp>
+      <p:sp>
+        <p:nvSpPr>
+          <p:cNvPr id="33" name="Agenda line 3"/>
+          <p:cNvSpPr txBox="1"/>
+          <p:nvPr/>
+        </p:nvSpPr>
+        <p:spPr>
+          <a:xfrm>
+            <a:off x="6178296" y="2304288"/>
+            <a:ext cx="2115311" cy="329184"/>
+          </a:xfrm>
+          <a:prstGeom prst="rect">
+            <a:avLst/>
+          </a:prstGeom>
+          <a:noFill/>
+        </p:spPr>
+        <p:txBody>
+          <a:bodyPr wrap="square" lIns="0" tIns="0" rIns="0" bIns="0" anchor="t">
+            <a:noAutofit/>
+          </a:bodyPr>
+          <a:lstStyle/>
+          <a:p>
+            <a:pPr algn="l"/>
+            <a:r>
+              <a:rPr sz="950" b="0" i="0" dirty="0">
+                <a:solidFill>
+                  <a:srgbClr val="4A5668"/>
+                </a:solidFill>
+                <a:latin typeface="Inter"/>
+              </a:rPr>
+              <a:t>One GPU host for the whole fleet.</a:t>
+            </a:r>
+          </a:p>
+        </p:txBody>
+      </p:sp>
+      <p:sp>
+        <p:nvSpPr>
+          <p:cNvPr id="34" name="Agenda card 4"/>
+          <p:cNvSpPr/>
+          <p:nvPr/>
+        </p:nvSpPr>
+        <p:spPr>
+          <a:xfrm>
+            <a:off x="667512" y="2916936"/>
+            <a:ext cx="2481071" cy="1527048"/>
+          </a:xfrm>
+          <a:prstGeom prst="roundRect">
+            <a:avLst>
+              <a:gd name="adj" fmla="val 3664"/>
+            </a:avLst>
+          </a:prstGeom>
+          <a:solidFill>
+            <a:srgbClr val="F4F6FA"/>
+          </a:solidFill>
+          <a:ln w="7620">
+            <a:solidFill>
+              <a:srgbClr val="D7DEEA"/>
+            </a:solidFill>
+          </a:ln>
+          <a:effectLst/>
+        </p:spPr>
+        <p:style>
+          <a:lnRef idx="1">
+            <a:schemeClr val="accent1"/>
+          </a:lnRef>
+          <a:fillRef idx="3">
+            <a:schemeClr val="accent1"/>
+          </a:fillRef>
+          <a:effectRef idx="2">
+            <a:schemeClr val="accent1"/>
+          </a:effectRef>
+          <a:fontRef idx="minor">
+            <a:schemeClr val="lt1"/>
+          </a:fontRef>
+        </p:style>
+        <p:txBody>
+          <a:bodyPr rtlCol="0" anchor="ctr"/>
+          <a:lstStyle/>
+          <a:p>
+            <a:pPr algn="ctr"/>
+            <a:endParaRPr/>
+          </a:p>
+        </p:txBody>
+      </p:sp>
+      <p:sp>
+        <p:nvSpPr>
+          <p:cNvPr id="35" name="Agenda icon circle 4"/>
+          <p:cNvSpPr/>
+          <p:nvPr/>
+        </p:nvSpPr>
+        <p:spPr>
+          <a:xfrm>
+            <a:off x="850392" y="3136391"/>
+            <a:ext cx="402336" cy="402336"/>
+          </a:xfrm>
+          <a:prstGeom prst="ellipse">
+            <a:avLst/>
+          </a:prstGeom>
+          <a:solidFill>
+            <a:srgbClr val="1A2340"/>
+          </a:solidFill>
+          <a:ln>
+            <a:noFill/>
+          </a:ln>
+          <a:effectLst/>
+        </p:spPr>
+        <p:style>
+          <a:lnRef idx="1">
+            <a:schemeClr val="accent1"/>
+          </a:lnRef>
+          <a:fillRef idx="3">
+            <a:schemeClr val="accent1"/>
+          </a:fillRef>
+          <a:effectRef idx="2">
+            <a:schemeClr val="accent1"/>
+          </a:effectRef>
+          <a:fontRef idx="minor">
+            <a:schemeClr val="lt1"/>
+          </a:fontRef>
+        </p:style>
+        <p:txBody>
+          <a:bodyPr rtlCol="0" anchor="ctr"/>
+          <a:lstStyle/>
+          <a:p>
+            <a:pPr algn="ctr"/>
+            <a:endParaRPr/>
+          </a:p>
+        </p:txBody>
+      </p:sp>
+      <p:pic>
+        <p:nvPicPr>
+          <p:cNvPr id="36" name="Agenda icon 4" descr="image.png"/>
+          <p:cNvPicPr>
+            <a:picLocks noChangeAspect="1"/>
+          </p:cNvPicPr>
+          <p:nvPr/>
+        </p:nvPicPr>
+        <p:blipFill>
+          <a:blip r:embed="rId5"/>
+          <a:stretch>
+            <a:fillRect/>
+          </a:stretch>
+        </p:blipFill>
+        <p:spPr>
+          <a:xfrm>
+            <a:off x="946403" y="3232404"/>
+            <a:ext cx="210312" cy="210312"/>
+          </a:xfrm>
+          <a:prstGeom prst="rect">
+            <a:avLst/>
+          </a:prstGeom>
+        </p:spPr>
+      </p:pic>
+      <p:sp>
+        <p:nvSpPr>
+          <p:cNvPr id="37" name="Agenda number 4"/>
+          <p:cNvSpPr txBox="1"/>
+          <p:nvPr/>
+        </p:nvSpPr>
+        <p:spPr>
+          <a:xfrm>
+            <a:off x="2599943" y="3172968"/>
+            <a:ext cx="365760" cy="146304"/>
+          </a:xfrm>
+          <a:prstGeom prst="rect">
+            <a:avLst/>
+          </a:prstGeom>
+          <a:noFill/>
+        </p:spPr>
+        <p:txBody>
+          <a:bodyPr wrap="square" lIns="0" tIns="0" rIns="0" bIns="0" anchor="t">
+            <a:noAutofit/>
+          </a:bodyPr>
+          <a:lstStyle/>
+          <a:p>
+            <a:pPr algn="r"/>
+            <a:r>
+              <a:rPr sz="650" b="1" i="0">
+                <a:solidFill>
+                  <a:srgbClr val="1A2340"/>
+                </a:solidFill>
+                <a:latin typeface="JetBrains Mono"/>
+              </a:rPr>
+              <a:t>04</a:t>
+            </a:r>
+          </a:p>
+        </p:txBody>
+      </p:sp>
+      <p:sp>
+        <p:nvSpPr>
+          <p:cNvPr id="38" name="Agenda title 4"/>
+          <p:cNvSpPr txBox="1"/>
+          <p:nvPr/>
+        </p:nvSpPr>
+        <p:spPr>
+          <a:xfrm>
+            <a:off x="850392" y="3739896"/>
+            <a:ext cx="2115311" cy="219456"/>
+          </a:xfrm>
+          <a:prstGeom prst="rect">
+            <a:avLst/>
+          </a:prstGeom>
+          <a:noFill/>
+        </p:spPr>
+        <p:txBody>
+          <a:bodyPr wrap="square" lIns="0" tIns="0" rIns="0" bIns="0" anchor="t">
+            <a:noAutofit/>
+          </a:bodyPr>
+          <a:lstStyle/>
+          <a:p>
+            <a:pPr algn="l"/>
+            <a:r>
+              <a:rPr sz="1200" b="1" i="0">
+                <a:solidFill>
+                  <a:srgbClr val="1A1A1E"/>
+                </a:solidFill>
+                <a:latin typeface="Inter"/>
+              </a:rPr>
+              <a:t>Live demo</a:t>
+            </a:r>
+          </a:p>
+        </p:txBody>
+      </p:sp>
+      <p:sp>
+        <p:nvSpPr>
+          <p:cNvPr id="39" name="Agenda line 4"/>
+          <p:cNvSpPr txBox="1"/>
+          <p:nvPr/>
+        </p:nvSpPr>
+        <p:spPr>
+          <a:xfrm>
+            <a:off x="850392" y="4014215"/>
+            <a:ext cx="2115311" cy="329184"/>
+          </a:xfrm>
+          <a:prstGeom prst="rect">
+            <a:avLst/>
+          </a:prstGeom>
+          <a:noFill/>
+        </p:spPr>
+        <p:txBody>
+          <a:bodyPr wrap="square" lIns="0" tIns="0" rIns="0" bIns="0" anchor="t">
+            <a:noAutofit/>
+          </a:bodyPr>
+          <a:lstStyle/>
+          <a:p>
+            <a:pPr algn="l"/>
+            <a:r>
+              <a:rPr sz="950" b="0" i="0" dirty="0">
+                <a:solidFill>
+                  <a:srgbClr val="4A5668"/>
+                </a:solidFill>
+                <a:latin typeface="Inter"/>
+              </a:rPr>
+              <a:t>Watch a release break, then heal.</a:t>
+            </a:r>
+          </a:p>
+        </p:txBody>
+      </p:sp>
+      <p:sp>
+        <p:nvSpPr>
+          <p:cNvPr id="40" name="Agenda card 5"/>
+          <p:cNvSpPr/>
+          <p:nvPr/>
+        </p:nvSpPr>
+        <p:spPr>
+          <a:xfrm>
+            <a:off x="3331464" y="2916936"/>
+            <a:ext cx="2481071" cy="1527048"/>
+          </a:xfrm>
+          <a:prstGeom prst="roundRect">
+            <a:avLst>
+              <a:gd name="adj" fmla="val 3664"/>
+            </a:avLst>
+          </a:prstGeom>
+          <a:solidFill>
+            <a:srgbClr val="F4F6FA"/>
+          </a:solidFill>
+          <a:ln w="7620">
+            <a:solidFill>
+              <a:srgbClr val="D7DEEA"/>
+            </a:solidFill>
+          </a:ln>
+          <a:effectLst/>
+        </p:spPr>
+        <p:style>
+          <a:lnRef idx="1">
+            <a:schemeClr val="accent1"/>
+          </a:lnRef>
+          <a:fillRef idx="3">
+            <a:schemeClr val="accent1"/>
+          </a:fillRef>
+          <a:effectRef idx="2">
+            <a:schemeClr val="accent1"/>
+          </a:effectRef>
+          <a:fontRef idx="minor">
+            <a:schemeClr val="lt1"/>
+          </a:fontRef>
+        </p:style>
+        <p:txBody>
+          <a:bodyPr rtlCol="0" anchor="ctr"/>
+          <a:lstStyle/>
+          <a:p>
+            <a:pPr algn="ctr"/>
+            <a:endParaRPr/>
+          </a:p>
+        </p:txBody>
+      </p:sp>
+      <p:sp>
+        <p:nvSpPr>
+          <p:cNvPr id="41" name="Agenda icon circle 5"/>
+          <p:cNvSpPr/>
+          <p:nvPr/>
+        </p:nvSpPr>
+        <p:spPr>
+          <a:xfrm>
+            <a:off x="3514344" y="3136391"/>
+            <a:ext cx="402336" cy="402336"/>
+          </a:xfrm>
+          <a:prstGeom prst="ellipse">
+            <a:avLst/>
+          </a:prstGeom>
+          <a:solidFill>
+            <a:srgbClr val="5F8B2F"/>
+          </a:solidFill>
+          <a:ln>
+            <a:noFill/>
+          </a:ln>
+          <a:effectLst/>
+        </p:spPr>
+        <p:style>
+          <a:lnRef idx="1">
+            <a:schemeClr val="accent1"/>
+          </a:lnRef>
+          <a:fillRef idx="3">
+            <a:schemeClr val="accent1"/>
+          </a:fillRef>
+          <a:effectRef idx="2">
+            <a:schemeClr val="accent1"/>
+          </a:effectRef>
+          <a:fontRef idx="minor">
+            <a:schemeClr val="lt1"/>
+          </a:fontRef>
+        </p:style>
+        <p:txBody>
+          <a:bodyPr rtlCol="0" anchor="ctr"/>
+          <a:lstStyle/>
+          <a:p>
+            <a:pPr algn="ctr"/>
+            <a:endParaRPr/>
+          </a:p>
+        </p:txBody>
+      </p:sp>
+      <p:pic>
+        <p:nvPicPr>
+          <p:cNvPr id="42" name="Agenda icon 5" descr="image.png"/>
+          <p:cNvPicPr>
+            <a:picLocks noChangeAspect="1"/>
+          </p:cNvPicPr>
+          <p:nvPr/>
+        </p:nvPicPr>
+        <p:blipFill>
+          <a:blip r:embed="rId6"/>
+          <a:stretch>
+            <a:fillRect/>
+          </a:stretch>
+        </p:blipFill>
+        <p:spPr>
+          <a:xfrm>
+            <a:off x="3610356" y="3232404"/>
+            <a:ext cx="210312" cy="210312"/>
+          </a:xfrm>
+          <a:prstGeom prst="rect">
+            <a:avLst/>
+          </a:prstGeom>
+        </p:spPr>
+      </p:pic>
+      <p:sp>
+        <p:nvSpPr>
+          <p:cNvPr id="43" name="Agenda number 5"/>
+          <p:cNvSpPr txBox="1"/>
+          <p:nvPr/>
+        </p:nvSpPr>
+        <p:spPr>
+          <a:xfrm>
+            <a:off x="5263895" y="3172968"/>
+            <a:ext cx="365760" cy="146304"/>
+          </a:xfrm>
+          <a:prstGeom prst="rect">
+            <a:avLst/>
+          </a:prstGeom>
+          <a:noFill/>
+        </p:spPr>
+        <p:txBody>
+          <a:bodyPr wrap="square" lIns="0" tIns="0" rIns="0" bIns="0" anchor="t">
+            <a:noAutofit/>
+          </a:bodyPr>
+          <a:lstStyle/>
+          <a:p>
+            <a:pPr algn="r"/>
+            <a:r>
+              <a:rPr sz="650" b="1" i="0">
+                <a:solidFill>
+                  <a:srgbClr val="4A6E24"/>
+                </a:solidFill>
+                <a:latin typeface="JetBrains Mono"/>
+              </a:rPr>
+              <a:t>05</a:t>
+            </a:r>
+          </a:p>
+        </p:txBody>
+      </p:sp>
+      <p:sp>
+        <p:nvSpPr>
+          <p:cNvPr id="44" name="Agenda title 5"/>
+          <p:cNvSpPr txBox="1"/>
+          <p:nvPr/>
+        </p:nvSpPr>
+        <p:spPr>
+          <a:xfrm>
+            <a:off x="3514344" y="3739896"/>
+            <a:ext cx="2115311" cy="219456"/>
+          </a:xfrm>
+          <a:prstGeom prst="rect">
+            <a:avLst/>
+          </a:prstGeom>
+          <a:noFill/>
+        </p:spPr>
+        <p:txBody>
+          <a:bodyPr wrap="square" lIns="0" tIns="0" rIns="0" bIns="0" anchor="t">
+            <a:noAutofit/>
+          </a:bodyPr>
+          <a:lstStyle/>
+          <a:p>
+            <a:pPr algn="l"/>
+            <a:r>
+              <a:rPr sz="1200" b="1" i="0">
+                <a:solidFill>
+                  <a:srgbClr val="1A1A1E"/>
+                </a:solidFill>
+                <a:latin typeface="Inter"/>
+              </a:rPr>
+              <a:t>Benefits</a:t>
+            </a:r>
+          </a:p>
+        </p:txBody>
+      </p:sp>
+      <p:sp>
+        <p:nvSpPr>
+          <p:cNvPr id="45" name="Agenda line 5"/>
+          <p:cNvSpPr txBox="1"/>
+          <p:nvPr/>
+        </p:nvSpPr>
+        <p:spPr>
+          <a:xfrm>
+            <a:off x="3514344" y="4014215"/>
+            <a:ext cx="2115311" cy="329184"/>
+          </a:xfrm>
+          <a:prstGeom prst="rect">
+            <a:avLst/>
+          </a:prstGeom>
+          <a:noFill/>
+        </p:spPr>
+        <p:txBody>
+          <a:bodyPr wrap="square" lIns="0" tIns="0" rIns="0" bIns="0" anchor="t">
+            <a:noAutofit/>
+          </a:bodyPr>
+          <a:lstStyle/>
+          <a:p>
+            <a:pPr algn="l"/>
+            <a:r>
+              <a:rPr sz="950" b="0" i="0" dirty="0">
+                <a:solidFill>
+                  <a:srgbClr val="4A5668"/>
+                </a:solidFill>
+                <a:latin typeface="Inter"/>
+              </a:rPr>
+              <a:t>For the business and for engineering.</a:t>
+            </a:r>
+          </a:p>
+        </p:txBody>
+      </p:sp>
+      <p:sp>
+        <p:nvSpPr>
+          <p:cNvPr id="46" name="Agenda card 6"/>
+          <p:cNvSpPr/>
+          <p:nvPr/>
+        </p:nvSpPr>
+        <p:spPr>
+          <a:xfrm>
+            <a:off x="5995416" y="2916936"/>
+            <a:ext cx="2481071" cy="1527048"/>
+          </a:xfrm>
+          <a:prstGeom prst="roundRect">
+            <a:avLst>
+              <a:gd name="adj" fmla="val 3664"/>
+            </a:avLst>
+          </a:prstGeom>
+          <a:solidFill>
+            <a:srgbClr val="F4F6FA"/>
+          </a:solidFill>
+          <a:ln w="7620">
+            <a:solidFill>
+              <a:srgbClr val="D7DEEA"/>
+            </a:solidFill>
+          </a:ln>
+          <a:effectLst/>
+        </p:spPr>
+        <p:style>
+          <a:lnRef idx="1">
+            <a:schemeClr val="accent1"/>
+          </a:lnRef>
+          <a:fillRef idx="3">
+            <a:schemeClr val="accent1"/>
+          </a:fillRef>
+          <a:effectRef idx="2">
+            <a:schemeClr val="accent1"/>
+          </a:effectRef>
+          <a:fontRef idx="minor">
+            <a:schemeClr val="lt1"/>
+          </a:fontRef>
+        </p:style>
+        <p:txBody>
+          <a:bodyPr rtlCol="0" anchor="ctr"/>
+          <a:lstStyle/>
+          <a:p>
+            <a:pPr algn="ctr"/>
+            <a:endParaRPr/>
+          </a:p>
+        </p:txBody>
+      </p:sp>
+      <p:sp>
+        <p:nvSpPr>
+          <p:cNvPr id="47" name="Agenda icon circle 6"/>
+          <p:cNvSpPr/>
+          <p:nvPr/>
+        </p:nvSpPr>
+        <p:spPr>
+          <a:xfrm>
+            <a:off x="6178296" y="3136391"/>
+            <a:ext cx="402336" cy="402336"/>
+          </a:xfrm>
+          <a:prstGeom prst="ellipse">
+            <a:avLst/>
+          </a:prstGeom>
+          <a:solidFill>
+            <a:srgbClr val="4A6E24"/>
+          </a:solidFill>
+          <a:ln>
+            <a:noFill/>
+          </a:ln>
+          <a:effectLst/>
+        </p:spPr>
+        <p:style>
+          <a:lnRef idx="1">
+            <a:schemeClr val="accent1"/>
+          </a:lnRef>
+          <a:fillRef idx="3">
+            <a:schemeClr val="accent1"/>
+          </a:fillRef>
+          <a:effectRef idx="2">
+            <a:schemeClr val="accent1"/>
+          </a:effectRef>
+          <a:fontRef idx="minor">
+            <a:schemeClr val="lt1"/>
+          </a:fontRef>
+        </p:style>
+        <p:txBody>
+          <a:bodyPr rtlCol="0" anchor="ctr"/>
+          <a:lstStyle/>
+          <a:p>
+            <a:pPr algn="ctr"/>
+            <a:endParaRPr/>
+          </a:p>
+        </p:txBody>
+      </p:sp>
+      <p:pic>
+        <p:nvPicPr>
+          <p:cNvPr id="48" name="Agenda icon 6" descr="image.png"/>
+          <p:cNvPicPr>
+            <a:picLocks noChangeAspect="1"/>
+          </p:cNvPicPr>
+          <p:nvPr/>
+        </p:nvPicPr>
+        <p:blipFill>
+          <a:blip r:embed="rId7"/>
+          <a:stretch>
+            <a:fillRect/>
+          </a:stretch>
+        </p:blipFill>
+        <p:spPr>
+          <a:xfrm>
+            <a:off x="6274308" y="3232404"/>
+            <a:ext cx="210312" cy="210312"/>
+          </a:xfrm>
+          <a:prstGeom prst="rect">
+            <a:avLst/>
+          </a:prstGeom>
+        </p:spPr>
+      </p:pic>
+      <p:sp>
+        <p:nvSpPr>
+          <p:cNvPr id="49" name="Agenda number 6"/>
+          <p:cNvSpPr txBox="1"/>
+          <p:nvPr/>
+        </p:nvSpPr>
+        <p:spPr>
+          <a:xfrm>
+            <a:off x="7927848" y="3172968"/>
+            <a:ext cx="365760" cy="146304"/>
+          </a:xfrm>
+          <a:prstGeom prst="rect">
+            <a:avLst/>
+          </a:prstGeom>
+          <a:noFill/>
+        </p:spPr>
+        <p:txBody>
+          <a:bodyPr wrap="square" lIns="0" tIns="0" rIns="0" bIns="0" anchor="t">
+            <a:noAutofit/>
+          </a:bodyPr>
+          <a:lstStyle/>
+          <a:p>
+            <a:pPr algn="r"/>
+            <a:r>
+              <a:rPr sz="650" b="1" i="0">
+                <a:solidFill>
+                  <a:srgbClr val="4A6E24"/>
+                </a:solidFill>
+                <a:latin typeface="JetBrains Mono"/>
+              </a:rPr>
+              <a:t>06</a:t>
+            </a:r>
+          </a:p>
+        </p:txBody>
+      </p:sp>
+      <p:sp>
+        <p:nvSpPr>
+          <p:cNvPr id="50" name="Agenda title 6"/>
+          <p:cNvSpPr txBox="1"/>
+          <p:nvPr/>
+        </p:nvSpPr>
+        <p:spPr>
+          <a:xfrm>
+            <a:off x="6178296" y="3739896"/>
+            <a:ext cx="2115311" cy="219456"/>
+          </a:xfrm>
+          <a:prstGeom prst="rect">
+            <a:avLst/>
+          </a:prstGeom>
+          <a:noFill/>
+        </p:spPr>
+        <p:txBody>
+          <a:bodyPr wrap="square" lIns="0" tIns="0" rIns="0" bIns="0" anchor="t">
+            <a:noAutofit/>
+          </a:bodyPr>
+          <a:lstStyle/>
+          <a:p>
+            <a:pPr algn="l"/>
+            <a:r>
+              <a:rPr sz="1200" b="1" i="0">
+                <a:solidFill>
+                  <a:srgbClr val="1A1A1E"/>
+                </a:solidFill>
+                <a:latin typeface="Inter"/>
+              </a:rPr>
+              <a:t>Commercial case</a:t>
+            </a:r>
+          </a:p>
+        </p:txBody>
+      </p:sp>
+      <p:sp>
+        <p:nvSpPr>
+          <p:cNvPr id="51" name="Agenda line 6"/>
+          <p:cNvSpPr txBox="1"/>
+          <p:nvPr/>
+        </p:nvSpPr>
+        <p:spPr>
+          <a:xfrm>
+            <a:off x="6178296" y="4014215"/>
+            <a:ext cx="2115311" cy="329184"/>
+          </a:xfrm>
+          <a:prstGeom prst="rect">
+            <a:avLst/>
+          </a:prstGeom>
+          <a:noFill/>
+        </p:spPr>
+        <p:txBody>
+          <a:bodyPr wrap="square" lIns="0" tIns="0" rIns="0" bIns="0" anchor="t">
+            <a:noAutofit/>
+          </a:bodyPr>
+          <a:lstStyle/>
+          <a:p>
+            <a:pPr algn="l"/>
+            <a:r>
+              <a:rPr sz="950" b="0" i="0" dirty="0">
+                <a:solidFill>
+                  <a:srgbClr val="4A5668"/>
+                </a:solidFill>
+                <a:latin typeface="Inter"/>
+              </a:rPr>
+              <a:t>~16,800 engineer-hours back a year.</a:t>
+            </a:r>
+          </a:p>
+        </p:txBody>
+      </p:sp>
+    </p:spTree>
+  </p:cSld>
+  <p:clrMapOvr>
+    <a:masterClrMapping/>
+  </p:clrMapOvr>
 </p:sld>
 </file>
 
